--- a/DataAnalysis_Track/decks/DA_S13_A_whole_investigation_end_to_end.pptx
+++ b/DataAnalysis_Track/decks/DA_S13_A_whole_investigation_end_to_end.pptx
@@ -479,7 +479,7 @@
 </file>
 
 <file path=ppt/notesSlides/notesSlide1.xml><?xml version="1.0" encoding="utf-8"?>
-<p:notes xmlns:a="http://schemas.openxmlformats.org/drawingml/2006/main" xmlns:p="http://schemas.openxmlformats.org/presentationml/2006/main" xmlns:r="http://schemas.openxmlformats.org/officeDocument/2006/relationships">
+<p:notes xmlns:a="http://schemas.openxmlformats.org/drawingml/2006/main" xmlns:p="http://schemas.openxmlformats.org/presentationml/2006/main">
   <p:cSld>
     <p:spTree>
       <p:nvGrpSpPr>
@@ -523,7 +523,87 @@
           <a:lstStyle/>
           <a:p>
             <a:r>
+              <a:t>TEACHING PURPOSE</a:t>
+            </a:r>
+          </a:p>
+          <a:p>
+            <a:r>
+              <a:t>A whole investigation, end to end</a:t>
+            </a:r>
+          </a:p>
+          <a:p>
+            <a:r>
+              <a:t/>
+            </a:r>
+          </a:p>
+          <a:p>
+            <a:r>
+              <a:t>LECTURER CUE</a:t>
+            </a:r>
+          </a:p>
+          <a:p>
+            <a:r>
               <a:t>Start on time.</a:t>
+            </a:r>
+          </a:p>
+          <a:p>
+            <a:r>
+              <a:t/>
+            </a:r>
+          </a:p>
+          <a:p>
+            <a:r>
+              <a:t>EXPLAIN IN ORDINARY WORDS</a:t>
+            </a:r>
+          </a:p>
+          <a:p>
+            <a:r>
+              <a:t>A notebook contains code cells and explanatory text cells. The runtime remembers values from cells that actually ran, which may differ from their visual order.</a:t>
+            </a:r>
+          </a:p>
+          <a:p>
+            <a:r>
+              <a:t/>
+            </a:r>
+          </a:p>
+          <a:p>
+            <a:r>
+              <a:t>CHECK AND EXPECTED ANSWER</a:t>
+            </a:r>
+          </a:p>
+          <a:p>
+            <a:r>
+              <a:t>Does editing a cell update a value already stored in memory? No; the cell must run.</a:t>
+            </a:r>
+          </a:p>
+          <a:p>
+            <a:r>
+              <a:t/>
+            </a:r>
+          </a:p>
+          <a:p>
+            <a:r>
+              <a:t>IF LEARNERS ARE STUCK</a:t>
+            </a:r>
+          </a:p>
+          <a:p>
+            <a:r>
+              <a:t>Outside an assessment restriction, restart and run from the top after loading data. Fix the first error before later cells; save the successful notebook.</a:t>
+            </a:r>
+          </a:p>
+          <a:p>
+            <a:r>
+              <a:t/>
+            </a:r>
+          </a:p>
+          <a:p>
+            <a:r>
+              <a:t>NEXT</a:t>
+            </a:r>
+          </a:p>
+          <a:p>
+            <a:r>
+              <a:t>Where tonight sits. Move on after a learner can explain the current example or required action.</a:t>
             </a:r>
           </a:p>
         </p:txBody>
@@ -549,7 +629,7 @@
 </file>
 
 <file path=ppt/notesSlides/notesSlide10.xml><?xml version="1.0" encoding="utf-8"?>
-<p:notes xmlns:a="http://schemas.openxmlformats.org/drawingml/2006/main" xmlns:p="http://schemas.openxmlformats.org/presentationml/2006/main" xmlns:r="http://schemas.openxmlformats.org/officeDocument/2006/relationships">
+<p:notes xmlns:a="http://schemas.openxmlformats.org/drawingml/2006/main" xmlns:p="http://schemas.openxmlformats.org/presentationml/2006/main">
   <p:cSld>
     <p:spTree>
       <p:nvGrpSpPr>
@@ -593,7 +673,102 @@
           <a:lstStyle/>
           <a:p>
             <a:r>
+              <a:t>TEACHING PURPOSE</a:t>
+            </a:r>
+          </a:p>
+          <a:p>
+            <a:r>
+              <a:t>Leakage</a:t>
+            </a:r>
+          </a:p>
+          <a:p>
+            <a:r>
+              <a:t/>
+            </a:r>
+          </a:p>
+          <a:p>
+            <a:r>
+              <a:t>CONNECT</a:t>
+            </a:r>
+          </a:p>
+          <a:p>
+            <a:r>
+              <a:t>Build on the preceding slide: A stated limitation.</a:t>
+            </a:r>
+          </a:p>
+          <a:p>
+            <a:r>
+              <a:t/>
+            </a:r>
+          </a:p>
+          <a:p>
+            <a:r>
+              <a:t>LECTURER CUE</a:t>
+            </a:r>
+          </a:p>
+          <a:p>
+            <a:r>
               <a:t>Using a column you would not have had at decision time, which makes the answer look far better than it is.</a:t>
+            </a:r>
+          </a:p>
+          <a:p>
+            <a:r>
+              <a:t/>
+            </a:r>
+          </a:p>
+          <a:p>
+            <a:r>
+              <a:t>EXPLAIN IN ORDINARY WORDS</a:t>
+            </a:r>
+          </a:p>
+          <a:p>
+            <a:r>
+              <a:t>Training fits rules. Validation helps choose among rules. The final test estimates performance after choices are fixed. Information that would be unavailable at the real prediction time must stay out of the inputs.</a:t>
+            </a:r>
+          </a:p>
+          <a:p>
+            <a:r>
+              <a:t/>
+            </a:r>
+          </a:p>
+          <a:p>
+            <a:r>
+              <a:t>CHECK AND EXPECTED ANSWER</a:t>
+            </a:r>
+          </a:p>
+          <a:p>
+            <a:r>
+              <a:t>May two readings of the same machine appear on both sides when evaluating new machines? No; split by machine. For forecasting, train on the past and evaluate later time.</a:t>
+            </a:r>
+          </a:p>
+          <a:p>
+            <a:r>
+              <a:t/>
+            </a:r>
+          </a:p>
+          <a:p>
+            <a:r>
+              <a:t>IF LEARNERS ARE STUCK</a:t>
+            </a:r>
+          </a:p>
+          <a:p>
+            <a:r>
+              <a:t>Use three envelopes. Keep the final-test envelope closed while selecting features or settings.</a:t>
+            </a:r>
+          </a:p>
+          <a:p>
+            <a:r>
+              <a:t/>
+            </a:r>
+          </a:p>
+          <a:p>
+            <a:r>
+              <a:t>NEXT</a:t>
+            </a:r>
+          </a:p>
+          <a:p>
+            <a:r>
+              <a:t>Break. Move on after a learner can explain the current example or required action.</a:t>
             </a:r>
           </a:p>
         </p:txBody>
@@ -618,8 +793,8 @@
 </p:notes>
 </file>
 
-<file path=ppt/notesSlides/notesSlide11.xml><?xml version="1.0" encoding="utf-8"?>
-<p:notes xmlns:a="http://schemas.openxmlformats.org/drawingml/2006/main" xmlns:p="http://schemas.openxmlformats.org/presentationml/2006/main" xmlns:r="http://schemas.openxmlformats.org/officeDocument/2006/relationships">
+<file path=ppt/notesSlides/notesSlide10006.xml><?xml version="1.0" encoding="utf-8"?>
+<p:notes xmlns:a="http://schemas.openxmlformats.org/drawingml/2006/main" xmlns:p="http://schemas.openxmlformats.org/presentationml/2006/main">
   <p:cSld>
     <p:spTree>
       <p:nvGrpSpPr>
@@ -663,7 +838,87 @@
           <a:lstStyle/>
           <a:p>
             <a:r>
-              <a:t>Ten minutes.</a:t>
+              <a:t>TEACHING PURPOSE</a:t>
+            </a:r>
+          </a:p>
+          <a:p>
+            <a:r>
+              <a:t>The routine, in a fixed order</a:t>
+            </a:r>
+          </a:p>
+          <a:p>
+            <a:r>
+              <a:t/>
+            </a:r>
+          </a:p>
+          <a:p>
+            <a:r>
+              <a:t>CONNECT</a:t>
+            </a:r>
+          </a:p>
+          <a:p>
+            <a:r>
+              <a:t>Build on the preceding slide: You have a file you have never seen and three hours..</a:t>
+            </a:r>
+          </a:p>
+          <a:p>
+            <a:r>
+              <a:t/>
+            </a:r>
+          </a:p>
+          <a:p>
+            <a:r>
+              <a:t>EXPLAIN IN ORDINARY WORDS</a:t>
+            </a:r>
+          </a:p>
+          <a:p>
+            <a:r>
+              <a:t>Missing means not recorded, not automatically zero. Decide why it is missing and document the rule. Fitted fill values must come from training data when evaluating a model.</a:t>
+            </a:r>
+          </a:p>
+          <a:p>
+            <a:r>
+              <a:t/>
+            </a:r>
+          </a:p>
+          <a:p>
+            <a:r>
+              <a:t>CHECK AND EXPECTED ANSWER</a:t>
+            </a:r>
+          </a:p>
+          <a:p>
+            <a:r>
+              <a:t>Is an unrecorded energy reading evidence of zero consumption? No.</a:t>
+            </a:r>
+          </a:p>
+          <a:p>
+            <a:r>
+              <a:t/>
+            </a:r>
+          </a:p>
+          <a:p>
+            <a:r>
+              <a:t>IF LEARNERS ARE STUCK</a:t>
+            </a:r>
+          </a:p>
+          <a:p>
+            <a:r>
+              <a:t>Use three rows: a recorded zero, a recorded positive value and a blank. Explain their different meanings before cleaning.</a:t>
+            </a:r>
+          </a:p>
+          <a:p>
+            <a:r>
+              <a:t/>
+            </a:r>
+          </a:p>
+          <a:p>
+            <a:r>
+              <a:t>NEXT</a:t>
+            </a:r>
+          </a:p>
+          <a:p>
+            <a:r>
+              <a:t>The routine. Same order, every dataset, every time.. Move on after a learner can explain the current example or required action.</a:t>
             </a:r>
           </a:p>
         </p:txBody>
@@ -688,8 +943,8 @@
 </p:notes>
 </file>
 
-<file path=ppt/notesSlides/notesSlide12.xml><?xml version="1.0" encoding="utf-8"?>
-<p:notes xmlns:a="http://schemas.openxmlformats.org/drawingml/2006/main" xmlns:p="http://schemas.openxmlformats.org/presentationml/2006/main" xmlns:r="http://schemas.openxmlformats.org/officeDocument/2006/relationships">
+<file path=ppt/notesSlides/notesSlide10013.xml><?xml version="1.0" encoding="utf-8"?>
+<p:notes xmlns:a="http://schemas.openxmlformats.org/drawingml/2006/main" xmlns:p="http://schemas.openxmlformats.org/presentationml/2006/main">
   <p:cSld>
     <p:spTree>
       <p:nvGrpSpPr>
@@ -733,7 +988,87 @@
           <a:lstStyle/>
           <a:p>
             <a:r>
-              <a:t>An investigation produces far more observations than findings. Choosing between them is part of the work.</a:t>
+              <a:t>TEACHING PURPOSE</a:t>
+            </a:r>
+          </a:p>
+          <a:p>
+            <a:r>
+              <a:t>From eleven observations to five findings</a:t>
+            </a:r>
+          </a:p>
+          <a:p>
+            <a:r>
+              <a:t/>
+            </a:r>
+          </a:p>
+          <a:p>
+            <a:r>
+              <a:t>CONNECT</a:t>
+            </a:r>
+          </a:p>
+          <a:p>
+            <a:r>
+              <a:t>Build on the preceding slide: Break.</a:t>
+            </a:r>
+          </a:p>
+          <a:p>
+            <a:r>
+              <a:t/>
+            </a:r>
+          </a:p>
+          <a:p>
+            <a:r>
+              <a:t>EXPLAIN IN ORDINARY WORDS</a:t>
+            </a:r>
+          </a:p>
+          <a:p>
+            <a:r>
+              <a:t>An observation describes the data. A finding answers a defined question with evidence. A recommendation adds an action, its justification and limits.</a:t>
+            </a:r>
+          </a:p>
+          <a:p>
+            <a:r>
+              <a:t/>
+            </a:r>
+          </a:p>
+          <a:p>
+            <a:r>
+              <a:t>CHECK AND EXPECTED ANSWER</a:t>
+            </a:r>
+          </a:p>
+          <a:p>
+            <a:r>
+              <a:t>Does a difference between two groups prove one caused the other? No. Other differences or selection may explain it.</a:t>
+            </a:r>
+          </a:p>
+          <a:p>
+            <a:r>
+              <a:t/>
+            </a:r>
+          </a:p>
+          <a:p>
+            <a:r>
+              <a:t>IF LEARNERS ARE STUCK</a:t>
+            </a:r>
+          </a:p>
+          <a:p>
+            <a:r>
+              <a:t>Ask for the population, time period, number and comparison. Then ask what additional evidence could change the recommendation.</a:t>
+            </a:r>
+          </a:p>
+          <a:p>
+            <a:r>
+              <a:t/>
+            </a:r>
+          </a:p>
+          <a:p>
+            <a:r>
+              <a:t>NEXT</a:t>
+            </a:r>
+          </a:p>
+          <a:p>
+            <a:r>
+              <a:t>Turning eleven observations into five findings. Move on after a learner can explain the current example or required action.</a:t>
             </a:r>
           </a:p>
         </p:txBody>
@@ -758,8 +1093,8 @@
 </p:notes>
 </file>
 
-<file path=ppt/notesSlides/notesSlide13.xml><?xml version="1.0" encoding="utf-8"?>
-<p:notes xmlns:a="http://schemas.openxmlformats.org/drawingml/2006/main" xmlns:p="http://schemas.openxmlformats.org/presentationml/2006/main" xmlns:r="http://schemas.openxmlformats.org/officeDocument/2006/relationships">
+<file path=ppt/notesSlides/notesSlide11.xml><?xml version="1.0" encoding="utf-8"?>
+<p:notes xmlns:a="http://schemas.openxmlformats.org/drawingml/2006/main" xmlns:p="http://schemas.openxmlformats.org/presentationml/2006/main">
   <p:cSld>
     <p:spTree>
       <p:nvGrpSpPr>
@@ -801,7 +1136,61 @@
         <p:txBody>
           <a:bodyPr/>
           <a:lstStyle/>
-          <a:p/>
+          <a:p>
+            <a:r>
+              <a:t>TEACHING PURPOSE</a:t>
+            </a:r>
+          </a:p>
+          <a:p>
+            <a:r>
+              <a:t>Break</a:t>
+            </a:r>
+          </a:p>
+          <a:p>
+            <a:r>
+              <a:t/>
+            </a:r>
+          </a:p>
+          <a:p>
+            <a:r>
+              <a:t>CONNECT</a:t>
+            </a:r>
+          </a:p>
+          <a:p>
+            <a:r>
+              <a:t>Build on the preceding slide: Leakage.</a:t>
+            </a:r>
+          </a:p>
+          <a:p>
+            <a:r>
+              <a:t/>
+            </a:r>
+          </a:p>
+          <a:p>
+            <a:r>
+              <a:t>LECTURER CUE</a:t>
+            </a:r>
+          </a:p>
+          <a:p>
+            <a:r>
+              <a:t>Ten minutes.</a:t>
+            </a:r>
+          </a:p>
+          <a:p>
+            <a:r>
+              <a:t/>
+            </a:r>
+          </a:p>
+          <a:p>
+            <a:r>
+              <a:t>NEXT</a:t>
+            </a:r>
+          </a:p>
+          <a:p>
+            <a:r>
+              <a:t>From eleven observations to five findings. Move on after a learner can explain the current example or required action.</a:t>
+            </a:r>
+          </a:p>
         </p:txBody>
       </p:sp>
       <p:sp>
@@ -824,8 +1213,8 @@
 </p:notes>
 </file>
 
-<file path=ppt/notesSlides/notesSlide14.xml><?xml version="1.0" encoding="utf-8"?>
-<p:notes xmlns:a="http://schemas.openxmlformats.org/drawingml/2006/main" xmlns:p="http://schemas.openxmlformats.org/presentationml/2006/main" xmlns:r="http://schemas.openxmlformats.org/officeDocument/2006/relationships">
+<file path=ppt/notesSlides/notesSlide12.xml><?xml version="1.0" encoding="utf-8"?>
+<p:notes xmlns:a="http://schemas.openxmlformats.org/drawingml/2006/main" xmlns:p="http://schemas.openxmlformats.org/presentationml/2006/main">
   <p:cSld>
     <p:spTree>
       <p:nvGrpSpPr>
@@ -869,7 +1258,117 @@
           <a:lstStyle/>
           <a:p>
             <a:r>
-              <a:t>A notebook with forty cells and no conclusion. The routine exists to stop exactly that.</a:t>
+              <a:t>TEACHING PURPOSE</a:t>
+            </a:r>
+          </a:p>
+          <a:p>
+            <a:r>
+              <a:t>Turning eleven observations into five findings</a:t>
+            </a:r>
+          </a:p>
+          <a:p>
+            <a:r>
+              <a:t/>
+            </a:r>
+          </a:p>
+          <a:p>
+            <a:r>
+              <a:t>CONNECT</a:t>
+            </a:r>
+          </a:p>
+          <a:p>
+            <a:r>
+              <a:t>Build on the preceding slide: From eleven observations to five findings.</a:t>
+            </a:r>
+          </a:p>
+          <a:p>
+            <a:r>
+              <a:t/>
+            </a:r>
+          </a:p>
+          <a:p>
+            <a:r>
+              <a:t>LECTURER CUE</a:t>
+            </a:r>
+          </a:p>
+          <a:p>
+            <a:r>
+              <a:t>An investigation produces far more observations than findings. Choosing between them is part of the work.</a:t>
+            </a:r>
+          </a:p>
+          <a:p>
+            <a:r>
+              <a:t/>
+            </a:r>
+          </a:p>
+          <a:p>
+            <a:r>
+              <a:t>EXPLAIN IN ORDINARY WORDS</a:t>
+            </a:r>
+          </a:p>
+          <a:p>
+            <a:r>
+              <a:t>An observation describes the data. A finding answers a defined question with evidence. A recommendation adds an action, its justification and limits.</a:t>
+            </a:r>
+          </a:p>
+          <a:p>
+            <a:r>
+              <a:t/>
+            </a:r>
+          </a:p>
+          <a:p>
+            <a:r>
+              <a:t>CHECK AND EXPECTED ANSWER</a:t>
+            </a:r>
+          </a:p>
+          <a:p>
+            <a:r>
+              <a:t>Does a difference between two groups prove one caused the other? No. Other differences or selection may explain it.</a:t>
+            </a:r>
+          </a:p>
+          <a:p>
+            <a:r>
+              <a:t/>
+            </a:r>
+          </a:p>
+          <a:p>
+            <a:r>
+              <a:t>IF LEARNERS ARE STUCK</a:t>
+            </a:r>
+          </a:p>
+          <a:p>
+            <a:r>
+              <a:t>Ask for the population, time period, number and comparison. Then ask what additional evidence could change the recommendation.</a:t>
+            </a:r>
+          </a:p>
+          <a:p>
+            <a:r>
+              <a:t/>
+            </a:r>
+          </a:p>
+          <a:p>
+            <a:r>
+              <a:t>TYPE NUANCE</a:t>
+            </a:r>
+          </a:p>
+          <a:p>
+            <a:r>
+              <a:t>An object dtype alone does not prove that a column contains bad numeric values; it can hold Python objects, including numbers. Inspect values and conversion results. Missing values may display as NaN, None, NaT or pandas NA depending on dtype.</a:t>
+            </a:r>
+          </a:p>
+          <a:p>
+            <a:r>
+              <a:t/>
+            </a:r>
+          </a:p>
+          <a:p>
+            <a:r>
+              <a:t>NEXT</a:t>
+            </a:r>
+          </a:p>
+          <a:p>
+            <a:r>
+              <a:t>Choose your sector dataset tonight. Move on after a learner can explain the current example or required action.</a:t>
             </a:r>
           </a:p>
         </p:txBody>
@@ -894,8 +1393,8 @@
 </p:notes>
 </file>
 
-<file path=ppt/notesSlides/notesSlide15.xml><?xml version="1.0" encoding="utf-8"?>
-<p:notes xmlns:a="http://schemas.openxmlformats.org/drawingml/2006/main" xmlns:p="http://schemas.openxmlformats.org/presentationml/2006/main" xmlns:r="http://schemas.openxmlformats.org/officeDocument/2006/relationships">
+<file path=ppt/notesSlides/notesSlide13.xml><?xml version="1.0" encoding="utf-8"?>
+<p:notes xmlns:a="http://schemas.openxmlformats.org/drawingml/2006/main" xmlns:p="http://schemas.openxmlformats.org/presentationml/2006/main">
   <p:cSld>
     <p:spTree>
       <p:nvGrpSpPr>
@@ -937,7 +1436,91 @@
         <p:txBody>
           <a:bodyPr/>
           <a:lstStyle/>
-          <a:p/>
+          <a:p>
+            <a:r>
+              <a:t>TEACHING PURPOSE</a:t>
+            </a:r>
+          </a:p>
+          <a:p>
+            <a:r>
+              <a:t>Choose your sector dataset tonight</a:t>
+            </a:r>
+          </a:p>
+          <a:p>
+            <a:r>
+              <a:t/>
+            </a:r>
+          </a:p>
+          <a:p>
+            <a:r>
+              <a:t>CONNECT</a:t>
+            </a:r>
+          </a:p>
+          <a:p>
+            <a:r>
+              <a:t>Build on the preceding slide: Turning eleven observations into five findings.</a:t>
+            </a:r>
+          </a:p>
+          <a:p>
+            <a:r>
+              <a:t/>
+            </a:r>
+          </a:p>
+          <a:p>
+            <a:r>
+              <a:t>EXPLAIN IN ORDINARY WORDS</a:t>
+            </a:r>
+          </a:p>
+          <a:p>
+            <a:r>
+              <a:t>Grouping puts rows sharing a key into buckets, then computes a result for each bucket. WHERE filters rows before SQL grouping; HAVING filters grouped results.</a:t>
+            </a:r>
+          </a:p>
+          <a:p>
+            <a:r>
+              <a:t/>
+            </a:r>
+          </a:p>
+          <a:p>
+            <a:r>
+              <a:t>CHECK AND EXPECTED ANSWER</a:t>
+            </a:r>
+          </a:p>
+          <a:p>
+            <a:r>
+              <a:t>Which condition keeps only groups with more than five rows? HAVING COUNT(*) &gt; 5.</a:t>
+            </a:r>
+          </a:p>
+          <a:p>
+            <a:r>
+              <a:t/>
+            </a:r>
+          </a:p>
+          <a:p>
+            <a:r>
+              <a:t>IF LEARNERS ARE STUCK</a:t>
+            </a:r>
+          </a:p>
+          <a:p>
+            <a:r>
+              <a:t>Draw two buckets and count by hand. Name the intended output grain before writing the aggregation.</a:t>
+            </a:r>
+          </a:p>
+          <a:p>
+            <a:r>
+              <a:t/>
+            </a:r>
+          </a:p>
+          <a:p>
+            <a:r>
+              <a:t>NEXT</a:t>
+            </a:r>
+          </a:p>
+          <a:p>
+            <a:r>
+              <a:t>A notebook with forty cells and no conclusion. The routine exists to stop exactly that.. Move on after a learner can explain the current example or required action.</a:t>
+            </a:r>
+          </a:p>
         </p:txBody>
       </p:sp>
       <p:sp>
@@ -960,8 +1543,8 @@
 </p:notes>
 </file>
 
-<file path=ppt/notesSlides/notesSlide16.xml><?xml version="1.0" encoding="utf-8"?>
-<p:notes xmlns:a="http://schemas.openxmlformats.org/drawingml/2006/main" xmlns:p="http://schemas.openxmlformats.org/presentationml/2006/main" xmlns:r="http://schemas.openxmlformats.org/officeDocument/2006/relationships">
+<file path=ppt/notesSlides/notesSlide14.xml><?xml version="1.0" encoding="utf-8"?>
+<p:notes xmlns:a="http://schemas.openxmlformats.org/drawingml/2006/main" xmlns:p="http://schemas.openxmlformats.org/presentationml/2006/main">
   <p:cSld>
     <p:spTree>
       <p:nvGrpSpPr>
@@ -1003,7 +1586,106 @@
         <p:txBody>
           <a:bodyPr/>
           <a:lstStyle/>
-          <a:p/>
+          <a:p>
+            <a:r>
+              <a:t>TEACHING PURPOSE</a:t>
+            </a:r>
+          </a:p>
+          <a:p>
+            <a:r>
+              <a:t>A notebook with forty cells and no conclusion. The routine exists to stop exactly that.</a:t>
+            </a:r>
+          </a:p>
+          <a:p>
+            <a:r>
+              <a:t/>
+            </a:r>
+          </a:p>
+          <a:p>
+            <a:r>
+              <a:t>CONNECT</a:t>
+            </a:r>
+          </a:p>
+          <a:p>
+            <a:r>
+              <a:t>Build on the preceding slide: Choose your sector dataset tonight.</a:t>
+            </a:r>
+          </a:p>
+          <a:p>
+            <a:r>
+              <a:t/>
+            </a:r>
+          </a:p>
+          <a:p>
+            <a:r>
+              <a:t>LECTURER CUE</a:t>
+            </a:r>
+          </a:p>
+          <a:p>
+            <a:r>
+              <a:t>A notebook with forty cells and no conclusion. The routine exists to stop exactly that.</a:t>
+            </a:r>
+          </a:p>
+          <a:p>
+            <a:r>
+              <a:t/>
+            </a:r>
+          </a:p>
+          <a:p>
+            <a:r>
+              <a:t>EXPLAIN IN ORDINARY WORDS</a:t>
+            </a:r>
+          </a:p>
+          <a:p>
+            <a:r>
+              <a:t>A notebook contains code cells and explanatory text cells. The runtime remembers values from cells that actually ran, which may differ from their visual order.</a:t>
+            </a:r>
+          </a:p>
+          <a:p>
+            <a:r>
+              <a:t/>
+            </a:r>
+          </a:p>
+          <a:p>
+            <a:r>
+              <a:t>CHECK AND EXPECTED ANSWER</a:t>
+            </a:r>
+          </a:p>
+          <a:p>
+            <a:r>
+              <a:t>Does editing a cell update a value already stored in memory? No; the cell must run.</a:t>
+            </a:r>
+          </a:p>
+          <a:p>
+            <a:r>
+              <a:t/>
+            </a:r>
+          </a:p>
+          <a:p>
+            <a:r>
+              <a:t>IF LEARNERS ARE STUCK</a:t>
+            </a:r>
+          </a:p>
+          <a:p>
+            <a:r>
+              <a:t>Outside an assessment restriction, restart and run from the top after loading data. Fix the first error before later cells; save the successful notebook.</a:t>
+            </a:r>
+          </a:p>
+          <a:p>
+            <a:r>
+              <a:t/>
+            </a:r>
+          </a:p>
+          <a:p>
+            <a:r>
+              <a:t>NEXT</a:t>
+            </a:r>
+          </a:p>
+          <a:p>
+            <a:r>
+              <a:t>Can you answer these?. Move on after a learner can explain the current example or required action.</a:t>
+            </a:r>
+          </a:p>
         </p:txBody>
       </p:sp>
       <p:sp>
@@ -1026,8 +1708,8 @@
 </p:notes>
 </file>
 
-<file path=ppt/notesSlides/notesSlide17.xml><?xml version="1.0" encoding="utf-8"?>
-<p:notes xmlns:a="http://schemas.openxmlformats.org/drawingml/2006/main" xmlns:p="http://schemas.openxmlformats.org/presentationml/2006/main" xmlns:r="http://schemas.openxmlformats.org/officeDocument/2006/relationships">
+<file path=ppt/notesSlides/notesSlide15.xml><?xml version="1.0" encoding="utf-8"?>
+<p:notes xmlns:a="http://schemas.openxmlformats.org/drawingml/2006/main" xmlns:p="http://schemas.openxmlformats.org/presentationml/2006/main">
   <p:cSld>
     <p:spTree>
       <p:nvGrpSpPr>
@@ -1071,7 +1753,157 @@
           <a:lstStyle/>
           <a:p>
             <a:r>
-              <a:t>This is the mid-track assessment, worth 30%. Six questions in order, then five findings. Marked on the findings and the limitations beside them, not on the code.</a:t>
+              <a:t>TEACHING PURPOSE</a:t>
+            </a:r>
+          </a:p>
+          <a:p>
+            <a:r>
+              <a:t>Can you answer these?</a:t>
+            </a:r>
+          </a:p>
+          <a:p>
+            <a:r>
+              <a:t/>
+            </a:r>
+          </a:p>
+          <a:p>
+            <a:r>
+              <a:t>CONNECT</a:t>
+            </a:r>
+          </a:p>
+          <a:p>
+            <a:r>
+              <a:t>Build on the preceding slide: A notebook with forty cells and no conclusion. The routine exists to stop exactly that..</a:t>
+            </a:r>
+          </a:p>
+          <a:p>
+            <a:r>
+              <a:t/>
+            </a:r>
+          </a:p>
+          <a:p>
+            <a:r>
+              <a:t>EXPLAIN IN ORDINARY WORDS</a:t>
+            </a:r>
+          </a:p>
+          <a:p>
+            <a:r>
+              <a:t>An observation describes the data. A finding answers a defined question with evidence. A recommendation adds an action, its justification and limits.</a:t>
+            </a:r>
+          </a:p>
+          <a:p>
+            <a:r>
+              <a:t/>
+            </a:r>
+          </a:p>
+          <a:p>
+            <a:r>
+              <a:t>CHECK AND EXPECTED ANSWER</a:t>
+            </a:r>
+          </a:p>
+          <a:p>
+            <a:r>
+              <a:t>Does a difference between two groups prove one caused the other? No. Other differences or selection may explain it.</a:t>
+            </a:r>
+          </a:p>
+          <a:p>
+            <a:r>
+              <a:t/>
+            </a:r>
+          </a:p>
+          <a:p>
+            <a:r>
+              <a:t>IF LEARNERS ARE STUCK</a:t>
+            </a:r>
+          </a:p>
+          <a:p>
+            <a:r>
+              <a:t>Ask for the population, time period, number and comparison. Then ask what additional evidence could change the recommendation.</a:t>
+            </a:r>
+          </a:p>
+          <a:p>
+            <a:r>
+              <a:t/>
+            </a:r>
+          </a:p>
+          <a:p>
+            <a:r>
+              <a:t>DISCUSSION KEY FOR THIS SLIDE</a:t>
+            </a:r>
+          </a:p>
+          <a:p>
+            <a:r>
+              <a:t>ANSWERS</a:t>
+            </a:r>
+          </a:p>
+          <a:p>
+            <a:r>
+              <a:t>How did you do?</a:t>
+            </a:r>
+          </a:p>
+          <a:p>
+            <a:r>
+              <a:t>A</a:t>
+            </a:r>
+          </a:p>
+          <a:p>
+            <a:r>
+              <a:t>Finding against observation</a:t>
+            </a:r>
+          </a:p>
+          <a:p>
+            <a:r>
+              <a:t>A finding is about the business, has a number in it, and somebody could act on it or dispute it. An observation is about the data. Both belong in the notebook; only findings belong in the summary.</a:t>
+            </a:r>
+          </a:p>
+          <a:p>
+            <a:r>
+              <a:t>B</a:t>
+            </a:r>
+          </a:p>
+          <a:p>
+            <a:r>
+              <a:t>An investigation with no surprises</a:t>
+            </a:r>
+          </a:p>
+          <a:p>
+            <a:r>
+              <a:t>No. Confirming what the room believed, with numbers attached, converts an assumption into something checkable. What IS a failure is not knowing which of the two you produced.</a:t>
+            </a:r>
+          </a:p>
+          <a:p>
+            <a:r>
+              <a:t>C</a:t>
+            </a:r>
+          </a:p>
+          <a:p>
+            <a:r>
+              <a:t>Why the limitation sits beside the finding</a:t>
+            </a:r>
+          </a:p>
+          <a:p>
+            <a:r>
+              <a:t>Because that is where the person acting on it reads. A limitation at the end of a document is a limitation nobody saw, and you will still be the one defending the number.</a:t>
+            </a:r>
+          </a:p>
+          <a:p>
+            <a:r>
+              <a:t>Let learners attempt first; use this to explain the reasoning, not just reveal the answer.</a:t>
+            </a:r>
+          </a:p>
+          <a:p>
+            <a:r>
+              <a:t/>
+            </a:r>
+          </a:p>
+          <a:p>
+            <a:r>
+              <a:t>NEXT</a:t>
+            </a:r>
+          </a:p>
+          <a:p>
+            <a:r>
+              <a:t>How did you do?. Move on after a learner can explain the current example or required action.</a:t>
             </a:r>
           </a:p>
         </p:txBody>
@@ -1096,8 +1928,8 @@
 </p:notes>
 </file>
 
-<file path=ppt/notesSlides/notesSlide18.xml><?xml version="1.0" encoding="utf-8"?>
-<p:notes xmlns:a="http://schemas.openxmlformats.org/drawingml/2006/main" xmlns:p="http://schemas.openxmlformats.org/presentationml/2006/main" xmlns:r="http://schemas.openxmlformats.org/officeDocument/2006/relationships">
+<file path=ppt/notesSlides/notesSlide16.xml><?xml version="1.0" encoding="utf-8"?>
+<p:notes xmlns:a="http://schemas.openxmlformats.org/drawingml/2006/main" xmlns:p="http://schemas.openxmlformats.org/presentationml/2006/main">
   <p:cSld>
     <p:spTree>
       <p:nvGrpSpPr>
@@ -1139,7 +1971,91 @@
         <p:txBody>
           <a:bodyPr/>
           <a:lstStyle/>
-          <a:p/>
+          <a:p>
+            <a:r>
+              <a:t>TEACHING PURPOSE</a:t>
+            </a:r>
+          </a:p>
+          <a:p>
+            <a:r>
+              <a:t>How did you do?</a:t>
+            </a:r>
+          </a:p>
+          <a:p>
+            <a:r>
+              <a:t/>
+            </a:r>
+          </a:p>
+          <a:p>
+            <a:r>
+              <a:t>CONNECT</a:t>
+            </a:r>
+          </a:p>
+          <a:p>
+            <a:r>
+              <a:t>Build on the preceding slide: Can you answer these?.</a:t>
+            </a:r>
+          </a:p>
+          <a:p>
+            <a:r>
+              <a:t/>
+            </a:r>
+          </a:p>
+          <a:p>
+            <a:r>
+              <a:t>EXPLAIN IN ORDINARY WORDS</a:t>
+            </a:r>
+          </a:p>
+          <a:p>
+            <a:r>
+              <a:t>A notebook contains code cells and explanatory text cells. The runtime remembers values from cells that actually ran, which may differ from their visual order.</a:t>
+            </a:r>
+          </a:p>
+          <a:p>
+            <a:r>
+              <a:t/>
+            </a:r>
+          </a:p>
+          <a:p>
+            <a:r>
+              <a:t>CHECK AND EXPECTED ANSWER</a:t>
+            </a:r>
+          </a:p>
+          <a:p>
+            <a:r>
+              <a:t>Does editing a cell update a value already stored in memory? No; the cell must run.</a:t>
+            </a:r>
+          </a:p>
+          <a:p>
+            <a:r>
+              <a:t/>
+            </a:r>
+          </a:p>
+          <a:p>
+            <a:r>
+              <a:t>IF LEARNERS ARE STUCK</a:t>
+            </a:r>
+          </a:p>
+          <a:p>
+            <a:r>
+              <a:t>Outside an assessment restriction, restart and run from the top after loading data. Fix the first error before later cells; save the successful notebook.</a:t>
+            </a:r>
+          </a:p>
+          <a:p>
+            <a:r>
+              <a:t/>
+            </a:r>
+          </a:p>
+          <a:p>
+            <a:r>
+              <a:t>NEXT</a:t>
+            </a:r>
+          </a:p>
+          <a:p>
+            <a:r>
+              <a:t>Run the routine on your sector dataset. Move on after a learner can explain the current example or required action.</a:t>
+            </a:r>
+          </a:p>
         </p:txBody>
       </p:sp>
       <p:sp>
@@ -1162,8 +2078,8 @@
 </p:notes>
 </file>
 
-<file path=ppt/notesSlides/notesSlide19.xml><?xml version="1.0" encoding="utf-8"?>
-<p:notes xmlns:a="http://schemas.openxmlformats.org/drawingml/2006/main" xmlns:p="http://schemas.openxmlformats.org/presentationml/2006/main" xmlns:r="http://schemas.openxmlformats.org/officeDocument/2006/relationships">
+<file path=ppt/notesSlides/notesSlide17.xml><?xml version="1.0" encoding="utf-8"?>
+<p:notes xmlns:a="http://schemas.openxmlformats.org/drawingml/2006/main" xmlns:p="http://schemas.openxmlformats.org/presentationml/2006/main">
   <p:cSld>
     <p:spTree>
       <p:nvGrpSpPr>
@@ -1207,7 +2123,102 @@
           <a:lstStyle/>
           <a:p>
             <a:r>
-              <a:t>Finish and submit the investigation: half a page of findings plus the notebook behind it.</a:t>
+              <a:t>TEACHING PURPOSE</a:t>
+            </a:r>
+          </a:p>
+          <a:p>
+            <a:r>
+              <a:t>Run the routine on your sector dataset</a:t>
+            </a:r>
+          </a:p>
+          <a:p>
+            <a:r>
+              <a:t/>
+            </a:r>
+          </a:p>
+          <a:p>
+            <a:r>
+              <a:t>CONNECT</a:t>
+            </a:r>
+          </a:p>
+          <a:p>
+            <a:r>
+              <a:t>Build on the preceding slide: How did you do?.</a:t>
+            </a:r>
+          </a:p>
+          <a:p>
+            <a:r>
+              <a:t/>
+            </a:r>
+          </a:p>
+          <a:p>
+            <a:r>
+              <a:t>LECTURER CUE</a:t>
+            </a:r>
+          </a:p>
+          <a:p>
+            <a:r>
+              <a:t>This is the sector assessment, worth 30%. Six questions in order, then five findings. Marked on the findings and the limitations beside them, not on the code.</a:t>
+            </a:r>
+          </a:p>
+          <a:p>
+            <a:r>
+              <a:t/>
+            </a:r>
+          </a:p>
+          <a:p>
+            <a:r>
+              <a:t>EXPLAIN IN ORDINARY WORDS</a:t>
+            </a:r>
+          </a:p>
+          <a:p>
+            <a:r>
+              <a:t>Mean is total divided by count. Median is the middle of sorted values. A percentile locates a position in that ordered distribution; interpolation conventions can differ. Match the summary to the question.</a:t>
+            </a:r>
+          </a:p>
+          <a:p>
+            <a:r>
+              <a:t/>
+            </a:r>
+          </a:p>
+          <a:p>
+            <a:r>
+              <a:t>CHECK AND EXPECTED ANSWER</a:t>
+            </a:r>
+          </a:p>
+          <a:p>
+            <a:r>
+              <a:t>For [2,3,4,5,100], median=4 and mean=22.8. The large value pulls the mean up.</a:t>
+            </a:r>
+          </a:p>
+          <a:p>
+            <a:r>
+              <a:t/>
+            </a:r>
+          </a:p>
+          <a:p>
+            <a:r>
+              <a:t>IF LEARNERS ARE STUCK</a:t>
+            </a:r>
+          </a:p>
+          <a:p>
+            <a:r>
+              <a:t>Sort five values by hand. A skewed distribution does not make the mean wrong if the question concerns totals or expected cost.</a:t>
+            </a:r>
+          </a:p>
+          <a:p>
+            <a:r>
+              <a:t/>
+            </a:r>
+          </a:p>
+          <a:p>
+            <a:r>
+              <a:t>NEXT</a:t>
+            </a:r>
+          </a:p>
+          <a:p>
+            <a:r>
+              <a:t>What you can do now. Move on after a learner can explain the current example or required action.</a:t>
             </a:r>
           </a:p>
         </p:txBody>
@@ -1232,8 +2243,8 @@
 </p:notes>
 </file>
 
-<file path=ppt/notesSlides/notesSlide2.xml><?xml version="1.0" encoding="utf-8"?>
-<p:notes xmlns:a="http://schemas.openxmlformats.org/drawingml/2006/main" xmlns:p="http://schemas.openxmlformats.org/presentationml/2006/main" xmlns:r="http://schemas.openxmlformats.org/officeDocument/2006/relationships">
+<file path=ppt/notesSlides/notesSlide18.xml><?xml version="1.0" encoding="utf-8"?>
+<p:notes xmlns:a="http://schemas.openxmlformats.org/drawingml/2006/main" xmlns:p="http://schemas.openxmlformats.org/presentationml/2006/main">
   <p:cSld>
     <p:spTree>
       <p:nvGrpSpPr>
@@ -1277,7 +2288,87 @@
           <a:lstStyle/>
           <a:p>
             <a:r>
-              <a:t>Tonight is session 13 of twelve.</a:t>
+              <a:t>TEACHING PURPOSE</a:t>
+            </a:r>
+          </a:p>
+          <a:p>
+            <a:r>
+              <a:t>What you can do now</a:t>
+            </a:r>
+          </a:p>
+          <a:p>
+            <a:r>
+              <a:t/>
+            </a:r>
+          </a:p>
+          <a:p>
+            <a:r>
+              <a:t>CONNECT</a:t>
+            </a:r>
+          </a:p>
+          <a:p>
+            <a:r>
+              <a:t>Build on the preceding slide: Run the routine on your sector dataset.</a:t>
+            </a:r>
+          </a:p>
+          <a:p>
+            <a:r>
+              <a:t/>
+            </a:r>
+          </a:p>
+          <a:p>
+            <a:r>
+              <a:t>EXPLAIN IN ORDINARY WORDS</a:t>
+            </a:r>
+          </a:p>
+          <a:p>
+            <a:r>
+              <a:t>A notebook contains code cells and explanatory text cells. The runtime remembers values from cells that actually ran, which may differ from their visual order.</a:t>
+            </a:r>
+          </a:p>
+          <a:p>
+            <a:r>
+              <a:t/>
+            </a:r>
+          </a:p>
+          <a:p>
+            <a:r>
+              <a:t>CHECK AND EXPECTED ANSWER</a:t>
+            </a:r>
+          </a:p>
+          <a:p>
+            <a:r>
+              <a:t>Does editing a cell update a value already stored in memory? No; the cell must run.</a:t>
+            </a:r>
+          </a:p>
+          <a:p>
+            <a:r>
+              <a:t/>
+            </a:r>
+          </a:p>
+          <a:p>
+            <a:r>
+              <a:t>IF LEARNERS ARE STUCK</a:t>
+            </a:r>
+          </a:p>
+          <a:p>
+            <a:r>
+              <a:t>Outside an assessment restriction, restart and run from the top after loading data. Fix the first error before later cells; save the successful notebook.</a:t>
+            </a:r>
+          </a:p>
+          <a:p>
+            <a:r>
+              <a:t/>
+            </a:r>
+          </a:p>
+          <a:p>
+            <a:r>
+              <a:t>NEXT</a:t>
+            </a:r>
+          </a:p>
+          <a:p>
+            <a:r>
+              <a:t>Before the next session. Move on after a learner can explain the current example or required action.</a:t>
             </a:r>
           </a:p>
         </p:txBody>
@@ -1302,8 +2393,8 @@
 </p:notes>
 </file>
 
-<file path=ppt/notesSlides/notesSlide20.xml><?xml version="1.0" encoding="utf-8"?>
-<p:notes xmlns:a="http://schemas.openxmlformats.org/drawingml/2006/main" xmlns:p="http://schemas.openxmlformats.org/presentationml/2006/main" xmlns:r="http://schemas.openxmlformats.org/officeDocument/2006/relationships">
+<file path=ppt/notesSlides/notesSlide19.xml><?xml version="1.0" encoding="utf-8"?>
+<p:notes xmlns:a="http://schemas.openxmlformats.org/drawingml/2006/main" xmlns:p="http://schemas.openxmlformats.org/presentationml/2006/main">
   <p:cSld>
     <p:spTree>
       <p:nvGrpSpPr>
@@ -1347,7 +2438,102 @@
           <a:lstStyle/>
           <a:p>
             <a:r>
-              <a:t>Every analyst you would want to hire has one. It is what lets them open an unfamiliar file at nine and say something defensible by eleven, which is the actual job.</a:t>
+              <a:t>TEACHING PURPOSE</a:t>
+            </a:r>
+          </a:p>
+          <a:p>
+            <a:r>
+              <a:t>Before the next session</a:t>
+            </a:r>
+          </a:p>
+          <a:p>
+            <a:r>
+              <a:t/>
+            </a:r>
+          </a:p>
+          <a:p>
+            <a:r>
+              <a:t>CONNECT</a:t>
+            </a:r>
+          </a:p>
+          <a:p>
+            <a:r>
+              <a:t>Build on the preceding slide: What you can do now.</a:t>
+            </a:r>
+          </a:p>
+          <a:p>
+            <a:r>
+              <a:t/>
+            </a:r>
+          </a:p>
+          <a:p>
+            <a:r>
+              <a:t>LECTURER CUE</a:t>
+            </a:r>
+          </a:p>
+          <a:p>
+            <a:r>
+              <a:t>Finish and submit the investigation: half a page of findings plus the notebook behind it.</a:t>
+            </a:r>
+          </a:p>
+          <a:p>
+            <a:r>
+              <a:t/>
+            </a:r>
+          </a:p>
+          <a:p>
+            <a:r>
+              <a:t>EXPLAIN IN ORDINARY WORDS</a:t>
+            </a:r>
+          </a:p>
+          <a:p>
+            <a:r>
+              <a:t>A notebook contains code cells and explanatory text cells. The runtime remembers values from cells that actually ran, which may differ from their visual order.</a:t>
+            </a:r>
+          </a:p>
+          <a:p>
+            <a:r>
+              <a:t/>
+            </a:r>
+          </a:p>
+          <a:p>
+            <a:r>
+              <a:t>CHECK AND EXPECTED ANSWER</a:t>
+            </a:r>
+          </a:p>
+          <a:p>
+            <a:r>
+              <a:t>Does editing a cell update a value already stored in memory? No; the cell must run.</a:t>
+            </a:r>
+          </a:p>
+          <a:p>
+            <a:r>
+              <a:t/>
+            </a:r>
+          </a:p>
+          <a:p>
+            <a:r>
+              <a:t>IF LEARNERS ARE STUCK</a:t>
+            </a:r>
+          </a:p>
+          <a:p>
+            <a:r>
+              <a:t>Outside an assessment restriction, restart and run from the top after loading data. Fix the first error before later cells; save the successful notebook.</a:t>
+            </a:r>
+          </a:p>
+          <a:p>
+            <a:r>
+              <a:t/>
+            </a:r>
+          </a:p>
+          <a:p>
+            <a:r>
+              <a:t>NEXT</a:t>
+            </a:r>
+          </a:p>
+          <a:p>
+            <a:r>
+              <a:t>A routine beats talent under time pressure. Move on after a learner can explain the current example or required action.</a:t>
             </a:r>
           </a:p>
         </p:txBody>
@@ -1372,8 +2558,8 @@
 </p:notes>
 </file>
 
-<file path=ppt/notesSlides/notesSlide3.xml><?xml version="1.0" encoding="utf-8"?>
-<p:notes xmlns:a="http://schemas.openxmlformats.org/drawingml/2006/main" xmlns:p="http://schemas.openxmlformats.org/presentationml/2006/main" xmlns:r="http://schemas.openxmlformats.org/officeDocument/2006/relationships">
+<file path=ppt/notesSlides/notesSlide2.xml><?xml version="1.0" encoding="utf-8"?>
+<p:notes xmlns:a="http://schemas.openxmlformats.org/drawingml/2006/main" xmlns:p="http://schemas.openxmlformats.org/presentationml/2006/main">
   <p:cSld>
     <p:spTree>
       <p:nvGrpSpPr>
@@ -1415,7 +2601,106 @@
         <p:txBody>
           <a:bodyPr/>
           <a:lstStyle/>
-          <a:p/>
+          <a:p>
+            <a:r>
+              <a:t>TEACHING PURPOSE</a:t>
+            </a:r>
+          </a:p>
+          <a:p>
+            <a:r>
+              <a:t>Where tonight sits</a:t>
+            </a:r>
+          </a:p>
+          <a:p>
+            <a:r>
+              <a:t/>
+            </a:r>
+          </a:p>
+          <a:p>
+            <a:r>
+              <a:t>CONNECT</a:t>
+            </a:r>
+          </a:p>
+          <a:p>
+            <a:r>
+              <a:t>Build on the preceding slide: A whole investigation, end to end.</a:t>
+            </a:r>
+          </a:p>
+          <a:p>
+            <a:r>
+              <a:t/>
+            </a:r>
+          </a:p>
+          <a:p>
+            <a:r>
+              <a:t>LECTURER CUE</a:t>
+            </a:r>
+          </a:p>
+          <a:p>
+            <a:r>
+              <a:t>Tonight is session 13 of fifteen.</a:t>
+            </a:r>
+          </a:p>
+          <a:p>
+            <a:r>
+              <a:t/>
+            </a:r>
+          </a:p>
+          <a:p>
+            <a:r>
+              <a:t>EXPLAIN IN ORDINARY WORDS</a:t>
+            </a:r>
+          </a:p>
+          <a:p>
+            <a:r>
+              <a:t>Grain means what one row represents. A key identifies a row; a primary key may use more than one column. A join matches keys, and multiple matches can multiply rows.</a:t>
+            </a:r>
+          </a:p>
+          <a:p>
+            <a:r>
+              <a:t/>
+            </a:r>
+          </a:p>
+          <a:p>
+            <a:r>
+              <a:t>CHECK AND EXPECTED ANSWER</a:t>
+            </a:r>
+          </a:p>
+          <a:p>
+            <a:r>
+              <a:t>One order has two lines. After joining orders to lines, how many rows for it? Two. Summing a repeated order-level total would double-count.</a:t>
+            </a:r>
+          </a:p>
+          <a:p>
+            <a:r>
+              <a:t/>
+            </a:r>
+          </a:p>
+          <a:p>
+            <a:r>
+              <a:t>IF LEARNERS ARE STUCK</a:t>
+            </a:r>
+          </a:p>
+          <a:p>
+            <a:r>
+              <a:t>Write one example row from each table. Circle keys and trace each match. Aggregate to the intended grain and check counts and totals.</a:t>
+            </a:r>
+          </a:p>
+          <a:p>
+            <a:r>
+              <a:t/>
+            </a:r>
+          </a:p>
+          <a:p>
+            <a:r>
+              <a:t>NEXT</a:t>
+            </a:r>
+          </a:p>
+          <a:p>
+            <a:r>
+              <a:t>The words for tonight. Move on after a learner can explain the current example or required action.</a:t>
+            </a:r>
+          </a:p>
         </p:txBody>
       </p:sp>
       <p:sp>
@@ -1438,8 +2723,8 @@
 </p:notes>
 </file>
 
-<file path=ppt/notesSlides/notesSlide4.xml><?xml version="1.0" encoding="utf-8"?>
-<p:notes xmlns:a="http://schemas.openxmlformats.org/drawingml/2006/main" xmlns:p="http://schemas.openxmlformats.org/presentationml/2006/main" xmlns:r="http://schemas.openxmlformats.org/officeDocument/2006/relationships">
+<file path=ppt/notesSlides/notesSlide20.xml><?xml version="1.0" encoding="utf-8"?>
+<p:notes xmlns:a="http://schemas.openxmlformats.org/drawingml/2006/main" xmlns:p="http://schemas.openxmlformats.org/presentationml/2006/main">
   <p:cSld>
     <p:spTree>
       <p:nvGrpSpPr>
@@ -1483,7 +2768,42 @@
           <a:lstStyle/>
           <a:p>
             <a:r>
-              <a:t>These three are what tonight is marked against, in the sense that the lab checks them.</a:t>
+              <a:t>TEACHING PURPOSE</a:t>
+            </a:r>
+          </a:p>
+          <a:p>
+            <a:r>
+              <a:t>A routine beats talent under time pressure</a:t>
+            </a:r>
+          </a:p>
+          <a:p>
+            <a:r>
+              <a:t/>
+            </a:r>
+          </a:p>
+          <a:p>
+            <a:r>
+              <a:t>CONNECT</a:t>
+            </a:r>
+          </a:p>
+          <a:p>
+            <a:r>
+              <a:t>Build on the preceding slide: Before the next session.</a:t>
+            </a:r>
+          </a:p>
+          <a:p>
+            <a:r>
+              <a:t/>
+            </a:r>
+          </a:p>
+          <a:p>
+            <a:r>
+              <a:t>LECTURER CUE</a:t>
+            </a:r>
+          </a:p>
+          <a:p>
+            <a:r>
+              <a:t>Every analyst you would want to hire has one. It is what lets them open an unfamiliar file at nine and say something defensible by eleven, which is the actual job.</a:t>
             </a:r>
           </a:p>
         </p:txBody>
@@ -1508,8 +2828,8 @@
 </p:notes>
 </file>
 
-<file path=ppt/notesSlides/notesSlide5.xml><?xml version="1.0" encoding="utf-8"?>
-<p:notes xmlns:a="http://schemas.openxmlformats.org/drawingml/2006/main" xmlns:p="http://schemas.openxmlformats.org/presentationml/2006/main" xmlns:r="http://schemas.openxmlformats.org/officeDocument/2006/relationships">
+<file path=ppt/notesSlides/notesSlide3.xml><?xml version="1.0" encoding="utf-8"?>
+<p:notes xmlns:a="http://schemas.openxmlformats.org/drawingml/2006/main" xmlns:p="http://schemas.openxmlformats.org/presentationml/2006/main">
   <p:cSld>
     <p:spTree>
       <p:nvGrpSpPr>
@@ -1553,7 +2873,87 @@
           <a:lstStyle/>
           <a:p>
             <a:r>
-              <a:t>In the same place every time. The routine is what stops an investigation becoming forty cells and no conclusion.</a:t>
+              <a:t>TEACHING PURPOSE</a:t>
+            </a:r>
+          </a:p>
+          <a:p>
+            <a:r>
+              <a:t>The words for tonight</a:t>
+            </a:r>
+          </a:p>
+          <a:p>
+            <a:r>
+              <a:t/>
+            </a:r>
+          </a:p>
+          <a:p>
+            <a:r>
+              <a:t>CONNECT</a:t>
+            </a:r>
+          </a:p>
+          <a:p>
+            <a:r>
+              <a:t>Build on the preceding slide: Where tonight sits.</a:t>
+            </a:r>
+          </a:p>
+          <a:p>
+            <a:r>
+              <a:t/>
+            </a:r>
+          </a:p>
+          <a:p>
+            <a:r>
+              <a:t>EXPLAIN IN ORDINARY WORDS</a:t>
+            </a:r>
+          </a:p>
+          <a:p>
+            <a:r>
+              <a:t>Training fits rules. Validation helps choose among rules. The final test estimates performance after choices are fixed. Information that would be unavailable at the real prediction time must stay out of the inputs.</a:t>
+            </a:r>
+          </a:p>
+          <a:p>
+            <a:r>
+              <a:t/>
+            </a:r>
+          </a:p>
+          <a:p>
+            <a:r>
+              <a:t>CHECK AND EXPECTED ANSWER</a:t>
+            </a:r>
+          </a:p>
+          <a:p>
+            <a:r>
+              <a:t>May two readings of the same machine appear on both sides when evaluating new machines? No; split by machine. For forecasting, train on the past and evaluate later time.</a:t>
+            </a:r>
+          </a:p>
+          <a:p>
+            <a:r>
+              <a:t/>
+            </a:r>
+          </a:p>
+          <a:p>
+            <a:r>
+              <a:t>IF LEARNERS ARE STUCK</a:t>
+            </a:r>
+          </a:p>
+          <a:p>
+            <a:r>
+              <a:t>Use three envelopes. Keep the final-test envelope closed while selecting features or settings.</a:t>
+            </a:r>
+          </a:p>
+          <a:p>
+            <a:r>
+              <a:t/>
+            </a:r>
+          </a:p>
+          <a:p>
+            <a:r>
+              <a:t>NEXT</a:t>
+            </a:r>
+          </a:p>
+          <a:p>
+            <a:r>
+              <a:t>By the end of tonight you can…. Move on after a learner can explain the current example or required action.</a:t>
             </a:r>
           </a:p>
         </p:txBody>
@@ -1578,8 +2978,8 @@
 </p:notes>
 </file>
 
-<file path=ppt/notesSlides/notesSlide6.xml><?xml version="1.0" encoding="utf-8"?>
-<p:notes xmlns:a="http://schemas.openxmlformats.org/drawingml/2006/main" xmlns:p="http://schemas.openxmlformats.org/presentationml/2006/main" xmlns:r="http://schemas.openxmlformats.org/officeDocument/2006/relationships">
+<file path=ppt/notesSlides/notesSlide4.xml><?xml version="1.0" encoding="utf-8"?>
+<p:notes xmlns:a="http://schemas.openxmlformats.org/drawingml/2006/main" xmlns:p="http://schemas.openxmlformats.org/presentationml/2006/main">
   <p:cSld>
     <p:spTree>
       <p:nvGrpSpPr>
@@ -1621,7 +3021,106 @@
         <p:txBody>
           <a:bodyPr/>
           <a:lstStyle/>
-          <a:p/>
+          <a:p>
+            <a:r>
+              <a:t>TEACHING PURPOSE</a:t>
+            </a:r>
+          </a:p>
+          <a:p>
+            <a:r>
+              <a:t>By the end of tonight you can…</a:t>
+            </a:r>
+          </a:p>
+          <a:p>
+            <a:r>
+              <a:t/>
+            </a:r>
+          </a:p>
+          <a:p>
+            <a:r>
+              <a:t>CONNECT</a:t>
+            </a:r>
+          </a:p>
+          <a:p>
+            <a:r>
+              <a:t>Build on the preceding slide: The words for tonight.</a:t>
+            </a:r>
+          </a:p>
+          <a:p>
+            <a:r>
+              <a:t/>
+            </a:r>
+          </a:p>
+          <a:p>
+            <a:r>
+              <a:t>LECTURER CUE</a:t>
+            </a:r>
+          </a:p>
+          <a:p>
+            <a:r>
+              <a:t>These three are what tonight is marked against, in the sense that the lab checks them.</a:t>
+            </a:r>
+          </a:p>
+          <a:p>
+            <a:r>
+              <a:t/>
+            </a:r>
+          </a:p>
+          <a:p>
+            <a:r>
+              <a:t>EXPLAIN IN ORDINARY WORDS</a:t>
+            </a:r>
+          </a:p>
+          <a:p>
+            <a:r>
+              <a:t>A notebook contains code cells and explanatory text cells. The runtime remembers values from cells that actually ran, which may differ from their visual order.</a:t>
+            </a:r>
+          </a:p>
+          <a:p>
+            <a:r>
+              <a:t/>
+            </a:r>
+          </a:p>
+          <a:p>
+            <a:r>
+              <a:t>CHECK AND EXPECTED ANSWER</a:t>
+            </a:r>
+          </a:p>
+          <a:p>
+            <a:r>
+              <a:t>Does editing a cell update a value already stored in memory? No; the cell must run.</a:t>
+            </a:r>
+          </a:p>
+          <a:p>
+            <a:r>
+              <a:t/>
+            </a:r>
+          </a:p>
+          <a:p>
+            <a:r>
+              <a:t>IF LEARNERS ARE STUCK</a:t>
+            </a:r>
+          </a:p>
+          <a:p>
+            <a:r>
+              <a:t>Outside an assessment restriction, restart and run from the top after loading data. Fix the first error before later cells; save the successful notebook.</a:t>
+            </a:r>
+          </a:p>
+          <a:p>
+            <a:r>
+              <a:t/>
+            </a:r>
+          </a:p>
+          <a:p>
+            <a:r>
+              <a:t>NEXT</a:t>
+            </a:r>
+          </a:p>
+          <a:p>
+            <a:r>
+              <a:t>You have a file you have never seen and three hours.. Move on after a learner can explain the current example or required action.</a:t>
+            </a:r>
+          </a:p>
         </p:txBody>
       </p:sp>
       <p:sp>
@@ -1644,8 +3143,8 @@
 </p:notes>
 </file>
 
-<file path=ppt/notesSlides/notesSlide7.xml><?xml version="1.0" encoding="utf-8"?>
-<p:notes xmlns:a="http://schemas.openxmlformats.org/drawingml/2006/main" xmlns:p="http://schemas.openxmlformats.org/presentationml/2006/main" xmlns:r="http://schemas.openxmlformats.org/officeDocument/2006/relationships">
+<file path=ppt/notesSlides/notesSlide5.xml><?xml version="1.0" encoding="utf-8"?>
+<p:notes xmlns:a="http://schemas.openxmlformats.org/drawingml/2006/main" xmlns:p="http://schemas.openxmlformats.org/presentationml/2006/main">
   <p:cSld>
     <p:spTree>
       <p:nvGrpSpPr>
@@ -1689,7 +3188,102 @@
           <a:lstStyle/>
           <a:p>
             <a:r>
-              <a:t>A sentence with a number in it that somebody could act on or dispute. It is about the business, not about the data.</a:t>
+              <a:t>TEACHING PURPOSE</a:t>
+            </a:r>
+          </a:p>
+          <a:p>
+            <a:r>
+              <a:t>You have a file you have never seen and three hours.</a:t>
+            </a:r>
+          </a:p>
+          <a:p>
+            <a:r>
+              <a:t/>
+            </a:r>
+          </a:p>
+          <a:p>
+            <a:r>
+              <a:t>CONNECT</a:t>
+            </a:r>
+          </a:p>
+          <a:p>
+            <a:r>
+              <a:t>Build on the preceding slide: By the end of tonight you can….</a:t>
+            </a:r>
+          </a:p>
+          <a:p>
+            <a:r>
+              <a:t/>
+            </a:r>
+          </a:p>
+          <a:p>
+            <a:r>
+              <a:t>LECTURER CUE</a:t>
+            </a:r>
+          </a:p>
+          <a:p>
+            <a:r>
+              <a:t>In the same place every time. The routine is what stops an investigation becoming forty cells and no conclusion.</a:t>
+            </a:r>
+          </a:p>
+          <a:p>
+            <a:r>
+              <a:t/>
+            </a:r>
+          </a:p>
+          <a:p>
+            <a:r>
+              <a:t>EXPLAIN IN ORDINARY WORDS</a:t>
+            </a:r>
+          </a:p>
+          <a:p>
+            <a:r>
+              <a:t>A notebook contains code cells and explanatory text cells. The runtime remembers values from cells that actually ran, which may differ from their visual order.</a:t>
+            </a:r>
+          </a:p>
+          <a:p>
+            <a:r>
+              <a:t/>
+            </a:r>
+          </a:p>
+          <a:p>
+            <a:r>
+              <a:t>CHECK AND EXPECTED ANSWER</a:t>
+            </a:r>
+          </a:p>
+          <a:p>
+            <a:r>
+              <a:t>Does editing a cell update a value already stored in memory? No; the cell must run.</a:t>
+            </a:r>
+          </a:p>
+          <a:p>
+            <a:r>
+              <a:t/>
+            </a:r>
+          </a:p>
+          <a:p>
+            <a:r>
+              <a:t>IF LEARNERS ARE STUCK</a:t>
+            </a:r>
+          </a:p>
+          <a:p>
+            <a:r>
+              <a:t>Outside an assessment restriction, restart and run from the top after loading data. Fix the first error before later cells; save the successful notebook.</a:t>
+            </a:r>
+          </a:p>
+          <a:p>
+            <a:r>
+              <a:t/>
+            </a:r>
+          </a:p>
+          <a:p>
+            <a:r>
+              <a:t>NEXT</a:t>
+            </a:r>
+          </a:p>
+          <a:p>
+            <a:r>
+              <a:t>The routine, in a fixed order. Move on after a learner can explain the current example or required action.</a:t>
             </a:r>
           </a:p>
         </p:txBody>
@@ -1714,8 +3308,8 @@
 </p:notes>
 </file>
 
-<file path=ppt/notesSlides/notesSlide8.xml><?xml version="1.0" encoding="utf-8"?>
-<p:notes xmlns:a="http://schemas.openxmlformats.org/drawingml/2006/main" xmlns:p="http://schemas.openxmlformats.org/presentationml/2006/main" xmlns:r="http://schemas.openxmlformats.org/officeDocument/2006/relationships">
+<file path=ppt/notesSlides/notesSlide6.xml><?xml version="1.0" encoding="utf-8"?>
+<p:notes xmlns:a="http://schemas.openxmlformats.org/drawingml/2006/main" xmlns:p="http://schemas.openxmlformats.org/presentationml/2006/main">
   <p:cSld>
     <p:spTree>
       <p:nvGrpSpPr>
@@ -1759,7 +3353,87 @@
           <a:lstStyle/>
           <a:p>
             <a:r>
-              <a:t>Something true about the data rather than about the business. It belongs in your notebook and not in your findings.</a:t>
+              <a:t>TEACHING PURPOSE</a:t>
+            </a:r>
+          </a:p>
+          <a:p>
+            <a:r>
+              <a:t>The routine. Same order, every dataset, every time.</a:t>
+            </a:r>
+          </a:p>
+          <a:p>
+            <a:r>
+              <a:t/>
+            </a:r>
+          </a:p>
+          <a:p>
+            <a:r>
+              <a:t>CONNECT</a:t>
+            </a:r>
+          </a:p>
+          <a:p>
+            <a:r>
+              <a:t>Build on the preceding slide: The routine, in a fixed order.</a:t>
+            </a:r>
+          </a:p>
+          <a:p>
+            <a:r>
+              <a:t/>
+            </a:r>
+          </a:p>
+          <a:p>
+            <a:r>
+              <a:t>EXPLAIN IN ORDINARY WORDS</a:t>
+            </a:r>
+          </a:p>
+          <a:p>
+            <a:r>
+              <a:t>Mean is total divided by count. Median is the middle of sorted values. A percentile locates a position in that ordered distribution; interpolation conventions can differ. Match the summary to the question.</a:t>
+            </a:r>
+          </a:p>
+          <a:p>
+            <a:r>
+              <a:t/>
+            </a:r>
+          </a:p>
+          <a:p>
+            <a:r>
+              <a:t>CHECK AND EXPECTED ANSWER</a:t>
+            </a:r>
+          </a:p>
+          <a:p>
+            <a:r>
+              <a:t>For [2,3,4,5,100], median=4 and mean=22.8. The large value pulls the mean up.</a:t>
+            </a:r>
+          </a:p>
+          <a:p>
+            <a:r>
+              <a:t/>
+            </a:r>
+          </a:p>
+          <a:p>
+            <a:r>
+              <a:t>IF LEARNERS ARE STUCK</a:t>
+            </a:r>
+          </a:p>
+          <a:p>
+            <a:r>
+              <a:t>Sort five values by hand. A skewed distribution does not make the mean wrong if the question concerns totals or expected cost.</a:t>
+            </a:r>
+          </a:p>
+          <a:p>
+            <a:r>
+              <a:t/>
+            </a:r>
+          </a:p>
+          <a:p>
+            <a:r>
+              <a:t>NEXT</a:t>
+            </a:r>
+          </a:p>
+          <a:p>
+            <a:r>
+              <a:t>A finding. Move on after a learner can explain the current example or required action.</a:t>
             </a:r>
           </a:p>
         </p:txBody>
@@ -1784,8 +3458,8 @@
 </p:notes>
 </file>
 
-<file path=ppt/notesSlides/notesSlide9.xml><?xml version="1.0" encoding="utf-8"?>
-<p:notes xmlns:a="http://schemas.openxmlformats.org/drawingml/2006/main" xmlns:p="http://schemas.openxmlformats.org/presentationml/2006/main" xmlns:r="http://schemas.openxmlformats.org/officeDocument/2006/relationships">
+<file path=ppt/notesSlides/notesSlide7.xml><?xml version="1.0" encoding="utf-8"?>
+<p:notes xmlns:a="http://schemas.openxmlformats.org/drawingml/2006/main" xmlns:p="http://schemas.openxmlformats.org/presentationml/2006/main">
   <p:cSld>
     <p:spTree>
       <p:nvGrpSpPr>
@@ -1829,7 +3503,432 @@
           <a:lstStyle/>
           <a:p>
             <a:r>
+              <a:t>TEACHING PURPOSE</a:t>
+            </a:r>
+          </a:p>
+          <a:p>
+            <a:r>
+              <a:t>A finding</a:t>
+            </a:r>
+          </a:p>
+          <a:p>
+            <a:r>
+              <a:t/>
+            </a:r>
+          </a:p>
+          <a:p>
+            <a:r>
+              <a:t>CONNECT</a:t>
+            </a:r>
+          </a:p>
+          <a:p>
+            <a:r>
+              <a:t>Build on the preceding slide: The routine. Same order, every dataset, every time..</a:t>
+            </a:r>
+          </a:p>
+          <a:p>
+            <a:r>
+              <a:t/>
+            </a:r>
+          </a:p>
+          <a:p>
+            <a:r>
+              <a:t>LECTURER CUE</a:t>
+            </a:r>
+          </a:p>
+          <a:p>
+            <a:r>
+              <a:t>A sentence with a number in it that somebody could act on or dispute. It is about the business, not about the data.</a:t>
+            </a:r>
+          </a:p>
+          <a:p>
+            <a:r>
+              <a:t/>
+            </a:r>
+          </a:p>
+          <a:p>
+            <a:r>
+              <a:t>EXPLAIN IN ORDINARY WORDS</a:t>
+            </a:r>
+          </a:p>
+          <a:p>
+            <a:r>
+              <a:t>An observation describes the data. A finding answers a defined question with evidence. A recommendation adds an action, its justification and limits.</a:t>
+            </a:r>
+          </a:p>
+          <a:p>
+            <a:r>
+              <a:t/>
+            </a:r>
+          </a:p>
+          <a:p>
+            <a:r>
+              <a:t>CHECK AND EXPECTED ANSWER</a:t>
+            </a:r>
+          </a:p>
+          <a:p>
+            <a:r>
+              <a:t>Does a difference between two groups prove one caused the other? No. Other differences or selection may explain it.</a:t>
+            </a:r>
+          </a:p>
+          <a:p>
+            <a:r>
+              <a:t/>
+            </a:r>
+          </a:p>
+          <a:p>
+            <a:r>
+              <a:t>IF LEARNERS ARE STUCK</a:t>
+            </a:r>
+          </a:p>
+          <a:p>
+            <a:r>
+              <a:t>Ask for the population, time period, number and comparison. Then ask what additional evidence could change the recommendation.</a:t>
+            </a:r>
+          </a:p>
+          <a:p>
+            <a:r>
+              <a:t/>
+            </a:r>
+          </a:p>
+          <a:p>
+            <a:r>
+              <a:t>NEXT</a:t>
+            </a:r>
+          </a:p>
+          <a:p>
+            <a:r>
+              <a:t>An observation. Move on after a learner can explain the current example or required action.</a:t>
+            </a:r>
+          </a:p>
+        </p:txBody>
+      </p:sp>
+      <p:sp>
+        <p:nvSpPr>
+          <p:cNvPr id="4" name="Slide Number Placeholder 3"/>
+          <p:cNvSpPr>
+            <a:spLocks noGrp="1"/>
+          </p:cNvSpPr>
+          <p:nvPr>
+            <p:ph type="sldNum" idx="5" sz="quarter"/>
+          </p:nvPr>
+        </p:nvSpPr>
+        <p:spPr/>
+      </p:sp>
+    </p:spTree>
+  </p:cSld>
+  <p:clrMapOvr>
+    <a:masterClrMapping/>
+  </p:clrMapOvr>
+</p:notes>
+</file>
+
+<file path=ppt/notesSlides/notesSlide8.xml><?xml version="1.0" encoding="utf-8"?>
+<p:notes xmlns:a="http://schemas.openxmlformats.org/drawingml/2006/main" xmlns:p="http://schemas.openxmlformats.org/presentationml/2006/main">
+  <p:cSld>
+    <p:spTree>
+      <p:nvGrpSpPr>
+        <p:cNvPr id="1" name=""/>
+        <p:cNvGrpSpPr/>
+        <p:nvPr/>
+      </p:nvGrpSpPr>
+      <p:grpSpPr>
+        <a:xfrm>
+          <a:off x="0" y="0"/>
+          <a:ext cx="0" cy="0"/>
+          <a:chOff x="0" y="0"/>
+          <a:chExt cx="0" cy="0"/>
+        </a:xfrm>
+      </p:grpSpPr>
+      <p:sp>
+        <p:nvSpPr>
+          <p:cNvPr id="2" name="Slide Image Placeholder 1"/>
+          <p:cNvSpPr>
+            <a:spLocks noGrp="1"/>
+          </p:cNvSpPr>
+          <p:nvPr>
+            <p:ph type="sldImg" idx="2"/>
+          </p:nvPr>
+        </p:nvSpPr>
+        <p:spPr/>
+      </p:sp>
+      <p:sp>
+        <p:nvSpPr>
+          <p:cNvPr id="3" name="Notes Placeholder 2"/>
+          <p:cNvSpPr>
+            <a:spLocks noGrp="1"/>
+          </p:cNvSpPr>
+          <p:nvPr>
+            <p:ph type="body" idx="3" sz="quarter"/>
+          </p:nvPr>
+        </p:nvSpPr>
+        <p:spPr/>
+        <p:txBody>
+          <a:bodyPr/>
+          <a:lstStyle/>
+          <a:p>
+            <a:r>
+              <a:t>TEACHING PURPOSE</a:t>
+            </a:r>
+          </a:p>
+          <a:p>
+            <a:r>
+              <a:t>An observation</a:t>
+            </a:r>
+          </a:p>
+          <a:p>
+            <a:r>
+              <a:t/>
+            </a:r>
+          </a:p>
+          <a:p>
+            <a:r>
+              <a:t>CONNECT</a:t>
+            </a:r>
+          </a:p>
+          <a:p>
+            <a:r>
+              <a:t>Build on the preceding slide: A finding.</a:t>
+            </a:r>
+          </a:p>
+          <a:p>
+            <a:r>
+              <a:t/>
+            </a:r>
+          </a:p>
+          <a:p>
+            <a:r>
+              <a:t>LECTURER CUE</a:t>
+            </a:r>
+          </a:p>
+          <a:p>
+            <a:r>
+              <a:t>Something true about the data rather than about the business. It belongs in your notebook and not in your findings.</a:t>
+            </a:r>
+          </a:p>
+          <a:p>
+            <a:r>
+              <a:t/>
+            </a:r>
+          </a:p>
+          <a:p>
+            <a:r>
+              <a:t>EXPLAIN IN ORDINARY WORDS</a:t>
+            </a:r>
+          </a:p>
+          <a:p>
+            <a:r>
+              <a:t>An observation describes the data. A finding answers a defined question with evidence. A recommendation adds an action, its justification and limits.</a:t>
+            </a:r>
+          </a:p>
+          <a:p>
+            <a:r>
+              <a:t/>
+            </a:r>
+          </a:p>
+          <a:p>
+            <a:r>
+              <a:t>CHECK AND EXPECTED ANSWER</a:t>
+            </a:r>
+          </a:p>
+          <a:p>
+            <a:r>
+              <a:t>Does a difference between two groups prove one caused the other? No. Other differences or selection may explain it.</a:t>
+            </a:r>
+          </a:p>
+          <a:p>
+            <a:r>
+              <a:t/>
+            </a:r>
+          </a:p>
+          <a:p>
+            <a:r>
+              <a:t>IF LEARNERS ARE STUCK</a:t>
+            </a:r>
+          </a:p>
+          <a:p>
+            <a:r>
+              <a:t>Ask for the population, time period, number and comparison. Then ask what additional evidence could change the recommendation.</a:t>
+            </a:r>
+          </a:p>
+          <a:p>
+            <a:r>
+              <a:t/>
+            </a:r>
+          </a:p>
+          <a:p>
+            <a:r>
+              <a:t>NEXT</a:t>
+            </a:r>
+          </a:p>
+          <a:p>
+            <a:r>
+              <a:t>A stated limitation. Move on after a learner can explain the current example or required action.</a:t>
+            </a:r>
+          </a:p>
+        </p:txBody>
+      </p:sp>
+      <p:sp>
+        <p:nvSpPr>
+          <p:cNvPr id="4" name="Slide Number Placeholder 3"/>
+          <p:cNvSpPr>
+            <a:spLocks noGrp="1"/>
+          </p:cNvSpPr>
+          <p:nvPr>
+            <p:ph type="sldNum" idx="5" sz="quarter"/>
+          </p:nvPr>
+        </p:nvSpPr>
+        <p:spPr/>
+      </p:sp>
+    </p:spTree>
+  </p:cSld>
+  <p:clrMapOvr>
+    <a:masterClrMapping/>
+  </p:clrMapOvr>
+</p:notes>
+</file>
+
+<file path=ppt/notesSlides/notesSlide9.xml><?xml version="1.0" encoding="utf-8"?>
+<p:notes xmlns:a="http://schemas.openxmlformats.org/drawingml/2006/main" xmlns:p="http://schemas.openxmlformats.org/presentationml/2006/main">
+  <p:cSld>
+    <p:spTree>
+      <p:nvGrpSpPr>
+        <p:cNvPr id="1" name=""/>
+        <p:cNvGrpSpPr/>
+        <p:nvPr/>
+      </p:nvGrpSpPr>
+      <p:grpSpPr>
+        <a:xfrm>
+          <a:off x="0" y="0"/>
+          <a:ext cx="0" cy="0"/>
+          <a:chOff x="0" y="0"/>
+          <a:chExt cx="0" cy="0"/>
+        </a:xfrm>
+      </p:grpSpPr>
+      <p:sp>
+        <p:nvSpPr>
+          <p:cNvPr id="2" name="Slide Image Placeholder 1"/>
+          <p:cNvSpPr>
+            <a:spLocks noGrp="1"/>
+          </p:cNvSpPr>
+          <p:nvPr>
+            <p:ph type="sldImg" idx="2"/>
+          </p:nvPr>
+        </p:nvSpPr>
+        <p:spPr/>
+      </p:sp>
+      <p:sp>
+        <p:nvSpPr>
+          <p:cNvPr id="3" name="Notes Placeholder 2"/>
+          <p:cNvSpPr>
+            <a:spLocks noGrp="1"/>
+          </p:cNvSpPr>
+          <p:nvPr>
+            <p:ph type="body" idx="3" sz="quarter"/>
+          </p:nvPr>
+        </p:nvSpPr>
+        <p:spPr/>
+        <p:txBody>
+          <a:bodyPr/>
+          <a:lstStyle/>
+          <a:p>
+            <a:r>
+              <a:t>TEACHING PURPOSE</a:t>
+            </a:r>
+          </a:p>
+          <a:p>
+            <a:r>
+              <a:t>A stated limitation</a:t>
+            </a:r>
+          </a:p>
+          <a:p>
+            <a:r>
+              <a:t/>
+            </a:r>
+          </a:p>
+          <a:p>
+            <a:r>
+              <a:t>CONNECT</a:t>
+            </a:r>
+          </a:p>
+          <a:p>
+            <a:r>
+              <a:t>Build on the preceding slide: An observation.</a:t>
+            </a:r>
+          </a:p>
+          <a:p>
+            <a:r>
+              <a:t/>
+            </a:r>
+          </a:p>
+          <a:p>
+            <a:r>
+              <a:t>LECTURER CUE</a:t>
+            </a:r>
+          </a:p>
+          <a:p>
+            <a:r>
               <a:t>The sentence beside a finding saying where it stops being reliable. Beside it, not in a footnote, because that is where the person acting on it will read.</a:t>
+            </a:r>
+          </a:p>
+          <a:p>
+            <a:r>
+              <a:t/>
+            </a:r>
+          </a:p>
+          <a:p>
+            <a:r>
+              <a:t>EXPLAIN IN ORDINARY WORDS</a:t>
+            </a:r>
+          </a:p>
+          <a:p>
+            <a:r>
+              <a:t>An observation describes the data. A finding answers a defined question with evidence. A recommendation adds an action, its justification and limits.</a:t>
+            </a:r>
+          </a:p>
+          <a:p>
+            <a:r>
+              <a:t/>
+            </a:r>
+          </a:p>
+          <a:p>
+            <a:r>
+              <a:t>CHECK AND EXPECTED ANSWER</a:t>
+            </a:r>
+          </a:p>
+          <a:p>
+            <a:r>
+              <a:t>Does a difference between two groups prove one caused the other? No. Other differences or selection may explain it.</a:t>
+            </a:r>
+          </a:p>
+          <a:p>
+            <a:r>
+              <a:t/>
+            </a:r>
+          </a:p>
+          <a:p>
+            <a:r>
+              <a:t>IF LEARNERS ARE STUCK</a:t>
+            </a:r>
+          </a:p>
+          <a:p>
+            <a:r>
+              <a:t>Ask for the population, time period, number and comparison. Then ask what additional evidence could change the recommendation.</a:t>
+            </a:r>
+          </a:p>
+          <a:p>
+            <a:r>
+              <a:t/>
+            </a:r>
+          </a:p>
+          <a:p>
+            <a:r>
+              <a:t>NEXT</a:t>
+            </a:r>
+          </a:p>
+          <a:p>
+            <a:r>
+              <a:t>Leakage. Move on after a learner can explain the current example or required action.</a:t>
             </a:r>
           </a:p>
         </p:txBody>
@@ -6101,7 +8200,7 @@
                 </a:solidFill>
                 <a:latin typeface="Calibri"/>
               </a:rPr>
-              <a:t>From notebook to finding. Eleven observations become five findings by striking anything about the data rather than the business, merging duplicates, and ranking what is left by what somebody could do about it. Then the l</a:t>
+              <a:t>From notebook to finding.</a:t>
             </a:r>
           </a:p>
         </p:txBody>
@@ -7086,7 +9185,7 @@
                 </a:solidFill>
                 <a:latin typeface="Calibri"/>
               </a:rPr>
-              <a:t>THE MID-TRACK ASSESSMENT</a:t>
+              <a:t>THE SECTOR ASSESSMENT</a:t>
             </a:r>
           </a:p>
         </p:txBody>
@@ -7167,7 +9266,7 @@
                 </a:solidFill>
                 <a:latin typeface="Calibri"/>
               </a:rPr>
-              <a:t>Three, all verified and open</a:t>
+              <a:t>Three fixed course snapshots</a:t>
             </a:r>
           </a:p>
         </p:txBody>
@@ -7181,7 +9280,7 @@
         <p:spPr>
           <a:xfrm>
             <a:off x="685800" y="2409332"/>
-            <a:ext cx="5204307" cy="372172"/>
+            <a:ext cx="5204307" cy="359114"/>
           </a:xfrm>
           <a:prstGeom prst="rect">
             <a:avLst/>
@@ -7203,7 +9302,7 @@
               </a:spcAft>
             </a:pPr>
             <a:r>
-              <a:rPr sz="1650" b="0" i="0">
+              <a:rPr sz="1584" b="0" i="0">
                 <a:solidFill>
                   <a:srgbClr val="3C4E5E"/>
                 </a:solidFill>
@@ -7222,8 +9321,8 @@
         </p:nvSpPr>
         <p:spPr>
           <a:xfrm>
-            <a:off x="685800" y="2836368"/>
-            <a:ext cx="5204307" cy="1025078"/>
+            <a:off x="685800" y="2777590"/>
+            <a:ext cx="5204307" cy="985903"/>
           </a:xfrm>
           <a:prstGeom prst="rect">
             <a:avLst/>
@@ -7245,13 +9344,13 @@
               </a:spcAft>
             </a:pPr>
             <a:r>
-              <a:rPr sz="1650" b="0" i="0">
+              <a:rPr sz="1584" b="0" i="0">
                 <a:solidFill>
                   <a:srgbClr val="3C4E5E"/>
                 </a:solidFill>
                 <a:latin typeface="Calibri"/>
               </a:rPr>
-              <a:t>Bank Marketing, UCI 222. 45,211 rows x 17. Campaign contacts against an outcome. Drop the duration column: it leaks.</a:t>
+              <a:t>Bank Marketing, UCI 222. 45,211 rows x 17. Campaign contacts against an outcome. Duration is post-call; exclude it from pre-call decisions.</a:t>
             </a:r>
           </a:p>
         </p:txBody>
@@ -7264,8 +9363,8 @@
         </p:nvSpPr>
         <p:spPr>
           <a:xfrm>
-            <a:off x="685800" y="3916310"/>
-            <a:ext cx="5204307" cy="372172"/>
+            <a:off x="685800" y="3772638"/>
+            <a:ext cx="5204307" cy="359114"/>
           </a:xfrm>
           <a:prstGeom prst="rect">
             <a:avLst/>
@@ -7287,7 +9386,7 @@
               </a:spcAft>
             </a:pPr>
             <a:r>
-              <a:rPr sz="1650" b="0" i="0">
+              <a:rPr sz="1584" b="0" i="0">
                 <a:solidFill>
                   <a:srgbClr val="3C4E5E"/>
                 </a:solidFill>
@@ -7306,8 +9405,8 @@
         </p:nvSpPr>
         <p:spPr>
           <a:xfrm>
-            <a:off x="685800" y="4343347"/>
-            <a:ext cx="5204307" cy="698625"/>
+            <a:off x="685800" y="4140896"/>
+            <a:ext cx="5204307" cy="672509"/>
           </a:xfrm>
           <a:prstGeom prst="rect">
             <a:avLst/>
@@ -7329,13 +9428,13 @@
               </a:spcAft>
             </a:pPr>
             <a:r>
-              <a:rPr sz="1650" b="0" i="0">
+              <a:rPr sz="1584" b="0" i="0">
                 <a:solidFill>
                   <a:srgbClr val="3C4E5E"/>
                 </a:solidFill>
                 <a:latin typeface="Calibri"/>
               </a:rPr>
-              <a:t>AI4I 2020, UCI 601. 10,000 rows x 14. Machine sensors against a failure flag, only 3.4% of which are failures.</a:t>
+              <a:t>AI4I 2020, UCI 601. 10,000 rows x 14. Synthetic observations against a failure flag, only 3.4% of which are failures.</a:t>
             </a:r>
           </a:p>
         </p:txBody>
@@ -7348,8 +9447,8 @@
         </p:nvSpPr>
         <p:spPr>
           <a:xfrm>
-            <a:off x="685800" y="5096836"/>
-            <a:ext cx="5204307" cy="372172"/>
+            <a:off x="685800" y="4822550"/>
+            <a:ext cx="5204307" cy="359114"/>
           </a:xfrm>
           <a:prstGeom prst="rect">
             <a:avLst/>
@@ -7371,13 +9470,13 @@
               </a:spcAft>
             </a:pPr>
             <a:r>
-              <a:rPr sz="1650" b="0" i="0">
+              <a:rPr sz="1584" b="0" i="0">
                 <a:solidFill>
                   <a:srgbClr val="3C4E5E"/>
                 </a:solidFill>
                 <a:latin typeface="Calibri"/>
               </a:rPr>
-              <a:t>PUBLIC SECTOR AND HEALTH</a:t>
+              <a:t>PUBLIC SECTOR AND DEVELOPMENT</a:t>
             </a:r>
           </a:p>
         </p:txBody>
@@ -7390,8 +9489,8 @@
         </p:nvSpPr>
         <p:spPr>
           <a:xfrm>
-            <a:off x="685800" y="5523873"/>
-            <a:ext cx="5204307" cy="698625"/>
+            <a:off x="685800" y="5190808"/>
+            <a:ext cx="5204307" cy="985903"/>
           </a:xfrm>
           <a:prstGeom prst="rect">
             <a:avLst/>
@@ -7413,13 +9512,13 @@
               </a:spcAft>
             </a:pPr>
             <a:r>
-              <a:rPr sz="1650" b="0" i="0">
+              <a:rPr sz="1584" b="0" i="0">
                 <a:solidFill>
                   <a:srgbClr val="3C4E5E"/>
                 </a:solidFill>
                 <a:latin typeface="Calibri"/>
               </a:rPr>
-              <a:t>World Bank indicators API, plus Uganda Healthsites: about 7,969 facilities with coordinates.</a:t>
+              <a:t>Uganda GDP in current USD, World Bank. One row per year, 2000–2023. Nominal dollar changes are not real growth or health outcomes.</a:t>
             </a:r>
           </a:p>
         </p:txBody>
@@ -7503,7 +9602,7 @@
                 </a:solidFill>
                 <a:latin typeface="Calibri"/>
               </a:rPr>
-              <a:t>All three are CC BY 4.0 or ODbL</a:t>
+              <a:t>Use the supplied files and source notes</a:t>
             </a:r>
           </a:p>
         </p:txBody>
@@ -7545,7 +9644,7 @@
                 </a:solidFill>
                 <a:latin typeface="Calibri"/>
               </a:rPr>
-              <a:t>No account, no licence problem, and they stay usable after this course ends.</a:t>
+              <a:t>Read data/sector_snapshots/README.md for attribution, source terms and interpretation limits.</a:t>
             </a:r>
           </a:p>
         </p:txBody>
@@ -7744,7 +9843,7 @@
         <p:spPr>
           <a:xfrm>
             <a:off x="685800" y="1600200"/>
-            <a:ext cx="10820095" cy="1100371"/>
+            <a:ext cx="10820095" cy="1603291"/>
           </a:xfrm>
           <a:prstGeom prst="rect">
             <a:avLst/>
@@ -7785,7 +9884,7 @@
         </p:nvSpPr>
         <p:spPr>
           <a:xfrm>
-            <a:off x="685800" y="2792011"/>
+            <a:off x="685800" y="3477811"/>
             <a:ext cx="10820095" cy="457200"/>
           </a:xfrm>
           <a:prstGeom prst="rect">
@@ -8887,7 +10986,7 @@
         <p:spPr>
           <a:xfrm>
             <a:off x="685800" y="1911095"/>
-            <a:ext cx="10820095" cy="969264"/>
+            <a:ext cx="10820095" cy="1236629"/>
           </a:xfrm>
           <a:prstGeom prst="roundRect">
             <a:avLst>
@@ -8932,7 +11031,7 @@
         <p:spPr>
           <a:xfrm>
             <a:off x="978408" y="2112264"/>
-            <a:ext cx="10234879" cy="603504"/>
+            <a:ext cx="10234879" cy="870869"/>
           </a:xfrm>
           <a:prstGeom prst="rect">
             <a:avLst/>
@@ -8960,7 +11059,7 @@
                 </a:solidFill>
                 <a:latin typeface="Calibri"/>
               </a:rPr>
-              <a:t>This is the mid-track assessment, worth 30%. Six questions in order, then five findings. Marked on the findings and the limitations beside them, not on the code.</a:t>
+              <a:t>This is the sector assessment, worth 30%. Six questions in order, then five findings. Marked on the findings and the limitations beside them, not on the code.</a:t>
             </a:r>
           </a:p>
         </p:txBody>
@@ -8973,7 +11072,7 @@
         </p:nvSpPr>
         <p:spPr>
           <a:xfrm>
-            <a:off x="685800" y="3191256"/>
+            <a:off x="685800" y="3422045"/>
             <a:ext cx="10820095" cy="310896"/>
           </a:xfrm>
           <a:prstGeom prst="rect">
@@ -8999,7 +11098,7 @@
                 </a:solidFill>
                 <a:latin typeface="Calibri"/>
               </a:rPr>
-              <a:t>Work these questions in order:</a:t>
+              <a:t>Work these questions in order</a:t>
             </a:r>
           </a:p>
         </p:txBody>
@@ -9012,8 +11111,8 @@
         </p:nvSpPr>
         <p:spPr>
           <a:xfrm>
-            <a:off x="685800" y="3611879"/>
-            <a:ext cx="5227167" cy="365760"/>
+            <a:off x="685800" y="3897533"/>
+            <a:ext cx="5227167" cy="385501"/>
           </a:xfrm>
           <a:prstGeom prst="rect">
             <a:avLst/>
@@ -9041,7 +11140,7 @@
                 </a:solidFill>
                 <a:latin typeface="Calibri"/>
               </a:rPr>
-              <a:t>→  What is the file a record of? What is one row?</a:t>
+              <a:t>What is the file a record of? What is one row?</a:t>
             </a:r>
           </a:p>
         </p:txBody>
@@ -9054,8 +11153,8 @@
         </p:nvSpPr>
         <p:spPr>
           <a:xfrm>
-            <a:off x="685800" y="4032504"/>
-            <a:ext cx="5227167" cy="365760"/>
+            <a:off x="685800" y="4374475"/>
+            <a:ext cx="5227167" cy="385501"/>
           </a:xfrm>
           <a:prstGeom prst="rect">
             <a:avLst/>
@@ -9083,7 +11182,7 @@
                 </a:solidFill>
                 <a:latin typeface="Calibri"/>
               </a:rPr>
-              <a:t>→  Time window, and is it complete?</a:t>
+              <a:t>Time window, and is it complete?</a:t>
             </a:r>
           </a:p>
         </p:txBody>
@@ -9096,8 +11195,8 @@
         </p:nvSpPr>
         <p:spPr>
           <a:xfrm>
-            <a:off x="685800" y="4453128"/>
-            <a:ext cx="5227167" cy="365760"/>
+            <a:off x="685800" y="4851416"/>
+            <a:ext cx="5227167" cy="385501"/>
           </a:xfrm>
           <a:prstGeom prst="rect">
             <a:avLst/>
@@ -9125,7 +11224,7 @@
                 </a:solidFill>
                 <a:latin typeface="Calibri"/>
               </a:rPr>
-              <a:t>→  What is missing, and is it missing for a reason?</a:t>
+              <a:t>What is missing, and is it missing for a reason?</a:t>
             </a:r>
           </a:p>
         </p:txBody>
@@ -9138,8 +11237,8 @@
         </p:nvSpPr>
         <p:spPr>
           <a:xfrm>
-            <a:off x="685800" y="4873752"/>
-            <a:ext cx="5227167" cy="365760"/>
+            <a:off x="685800" y="5328358"/>
+            <a:ext cx="5227167" cy="697851"/>
           </a:xfrm>
           <a:prstGeom prst="rect">
             <a:avLst/>
@@ -9167,7 +11266,7 @@
                 </a:solidFill>
                 <a:latin typeface="Calibri"/>
               </a:rPr>
-              <a:t>→  The distribution of the thing that matters, with a chart.</a:t>
+              <a:t>The distribution of the thing that matters, with a chart.</a:t>
             </a:r>
           </a:p>
         </p:txBody>
@@ -9180,8 +11279,8 @@
         </p:nvSpPr>
         <p:spPr>
           <a:xfrm>
-            <a:off x="6278727" y="3611879"/>
-            <a:ext cx="5227167" cy="365760"/>
+            <a:off x="6278727" y="3897533"/>
+            <a:ext cx="5227167" cy="385501"/>
           </a:xfrm>
           <a:prstGeom prst="rect">
             <a:avLst/>
@@ -9209,7 +11308,7 @@
                 </a:solidFill>
                 <a:latin typeface="Calibri"/>
               </a:rPr>
-              <a:t>→  Two or three comparisons the domain suggests.</a:t>
+              <a:t>Two or three comparisons the domain suggests.</a:t>
             </a:r>
           </a:p>
         </p:txBody>
@@ -9222,8 +11321,8 @@
         </p:nvSpPr>
         <p:spPr>
           <a:xfrm>
-            <a:off x="6278727" y="4032504"/>
-            <a:ext cx="5227167" cy="365760"/>
+            <a:off x="6278727" y="4374475"/>
+            <a:ext cx="5227167" cy="697851"/>
           </a:xfrm>
           <a:prstGeom prst="rect">
             <a:avLst/>
@@ -9251,7 +11350,7 @@
                 </a:solidFill>
                 <a:latin typeface="Calibri"/>
               </a:rPr>
-              <a:t>→  Five findings, each one sentence with a number and a limitation.</a:t>
+              <a:t>Five findings, each one sentence with a number and a limitation.</a:t>
             </a:r>
           </a:p>
         </p:txBody>
@@ -9264,8 +11363,8 @@
         </p:nvSpPr>
         <p:spPr>
           <a:xfrm>
-            <a:off x="6278727" y="4453128"/>
-            <a:ext cx="5227167" cy="365760"/>
+            <a:off x="6278727" y="5163766"/>
+            <a:ext cx="5227167" cy="385501"/>
           </a:xfrm>
           <a:prstGeom prst="rect">
             <a:avLst/>
@@ -9293,7 +11392,7 @@
                 </a:solidFill>
                 <a:latin typeface="Calibri"/>
               </a:rPr>
-              <a:t>→  What would change your mind?</a:t>
+              <a:t>What would change your mind?</a:t>
             </a:r>
           </a:p>
         </p:txBody>
@@ -13776,7 +15875,7 @@
                 </a:solidFill>
                 <a:latin typeface="Calibri"/>
               </a:rPr>
-              <a:t>The routine, written up and followed live on a dataset nobody has seen: what is this file a record of, what is one row, what is the window, what is missing, what does the main quantity look like, what moves with what, an</a:t>
+              <a:t>The routine, written up and followed live on a dataset nobody has seen: what is this file a record of, what is one row, what is the window, what is missing, what does the main quantity look like, what moves with what, and what would change my mind..</a:t>
             </a:r>
           </a:p>
         </p:txBody>
